--- a/Data/pp.báo cáo.pptx
+++ b/Data/pp.báo cáo.pptx
@@ -8,7 +8,7 @@
     <p:notesMasterId r:id="rId4"/>
   </p:notesMasterIdLst>
   <p:handoutMasterIdLst>
-    <p:handoutMasterId r:id="rId34"/>
+    <p:handoutMasterId r:id="rId39"/>
   </p:handoutMasterIdLst>
   <p:sldIdLst>
     <p:sldId id="256" r:id="rId3"/>
@@ -40,25 +40,30 @@
     <p:sldId id="283" r:id="rId30"/>
     <p:sldId id="284" r:id="rId31"/>
     <p:sldId id="285" r:id="rId32"/>
-    <p:sldId id="290" r:id="rId33"/>
+    <p:sldId id="291" r:id="rId33"/>
+    <p:sldId id="292" r:id="rId34"/>
+    <p:sldId id="293" r:id="rId35"/>
+    <p:sldId id="294" r:id="rId36"/>
+    <p:sldId id="295" r:id="rId37"/>
+    <p:sldId id="290" r:id="rId38"/>
   </p:sldIdLst>
   <p:sldSz cx="12192000" cy="6858000"/>
   <p:notesSz cx="6858000" cy="9144000"/>
   <p:embeddedFontLst>
     <p:embeddedFont>
       <p:font typeface="Garamond" panose="02020404030301010803"/>
-      <p:regular r:id="rId38"/>
-      <p:bold r:id="rId39"/>
-      <p:italic r:id="rId40"/>
+      <p:regular r:id="rId43"/>
+      <p:bold r:id="rId44"/>
+      <p:italic r:id="rId45"/>
     </p:embeddedFont>
     <p:embeddedFont>
       <p:font typeface="Wingdings 2" panose="05020102010507070707" charset="0"/>
-      <p:regular r:id="rId41"/>
+      <p:regular r:id="rId46"/>
     </p:embeddedFont>
     <p:embeddedFont>
       <p:font typeface="Gill Sans" panose="020B0502020104020203"/>
-      <p:regular r:id="rId42"/>
-      <p:bold r:id="rId43"/>
+      <p:regular r:id="rId47"/>
+      <p:bold r:id="rId48"/>
     </p:embeddedFont>
   </p:embeddedFontLst>
   <p:defaultTextStyle>
@@ -34676,7 +34681,7 @@
             </a:pPr>
             <a:r>
               <a:rPr lang="en-US"/>
-              <a:t>Giao diện thiết kế trang LoaiSP-&gt;Index.cshtml</a:t>
+              <a:t>Giao diện thiết kế trang DonViTinh-&gt;Index.cshtml</a:t>
             </a:r>
             <a:endParaRPr lang="en-US"/>
           </a:p>
@@ -34710,7 +34715,7 @@
       </p:pic>
       <p:pic>
         <p:nvPicPr>
-          <p:cNvPr id="1" name="Picture 0" descr="Screenshot 2026-09-23 152638"/>
+          <p:cNvPr id="2" name="Picture 1" descr="Screenshot 2026-09-23 152638"/>
           <p:cNvPicPr>
             <a:picLocks noChangeAspect="1"/>
           </p:cNvPicPr>
@@ -34726,6 +34731,30 @@
           <a:xfrm>
             <a:off x="983615" y="1629410"/>
             <a:ext cx="10039985" cy="4707890"/>
+          </a:xfrm>
+          <a:prstGeom prst="rect">
+            <a:avLst/>
+          </a:prstGeom>
+        </p:spPr>
+      </p:pic>
+      <p:pic>
+        <p:nvPicPr>
+          <p:cNvPr id="1" name="Picture 0" descr="Screenshot 2026-09-25 121656"/>
+          <p:cNvPicPr>
+            <a:picLocks noChangeAspect="1"/>
+          </p:cNvPicPr>
+          <p:nvPr/>
+        </p:nvPicPr>
+        <p:blipFill>
+          <a:blip r:embed="rId3"/>
+          <a:stretch>
+            <a:fillRect/>
+          </a:stretch>
+        </p:blipFill>
+        <p:spPr>
+          <a:xfrm>
+            <a:off x="911860" y="1567180"/>
+            <a:ext cx="10194290" cy="4626610"/>
           </a:xfrm>
           <a:prstGeom prst="rect">
             <a:avLst/>
@@ -34904,6 +34933,406 @@
 </file>
 
 <file path=ppt/slides/slide30.xml><?xml version="1.0" encoding="utf-8"?>
+<p:sld xmlns:a="http://schemas.openxmlformats.org/drawingml/2006/main" xmlns:r="http://schemas.openxmlformats.org/officeDocument/2006/relationships" xmlns:p="http://schemas.openxmlformats.org/presentationml/2006/main">
+  <p:cSld>
+    <p:spTree>
+      <p:nvGrpSpPr>
+        <p:cNvPr id="1" name=""/>
+        <p:cNvGrpSpPr/>
+        <p:nvPr/>
+      </p:nvGrpSpPr>
+      <p:grpSpPr/>
+      <p:sp>
+        <p:nvSpPr>
+          <p:cNvPr id="2" name="Title 1"/>
+          <p:cNvSpPr/>
+          <p:nvPr>
+            <p:ph type="title"/>
+          </p:nvPr>
+        </p:nvSpPr>
+        <p:spPr/>
+        <p:txBody>
+          <a:bodyPr>
+            <a:normAutofit fontScale="90000"/>
+          </a:bodyPr>
+          <a:p>
+            <a:r>
+              <a:rPr lang="en-US"/>
+              <a:t>PROC DonViTinh_DS</a:t>
+            </a:r>
+            <a:endParaRPr lang="en-US"/>
+          </a:p>
+        </p:txBody>
+      </p:sp>
+      <p:sp>
+        <p:nvSpPr>
+          <p:cNvPr id="3" name="Text Placeholder 2"/>
+          <p:cNvSpPr/>
+          <p:nvPr>
+            <p:ph type="body" idx="1"/>
+          </p:nvPr>
+        </p:nvSpPr>
+        <p:spPr/>
+        <p:txBody>
+          <a:bodyPr/>
+          <a:p>
+            <a:endParaRPr lang="en-US"/>
+          </a:p>
+        </p:txBody>
+      </p:sp>
+      <p:pic>
+        <p:nvPicPr>
+          <p:cNvPr id="4" name="Picture 3" descr="Screenshot 2026-09-25 120508"/>
+          <p:cNvPicPr>
+            <a:picLocks noChangeAspect="1"/>
+          </p:cNvPicPr>
+          <p:nvPr/>
+        </p:nvPicPr>
+        <p:blipFill>
+          <a:blip r:embed="rId1"/>
+          <a:stretch>
+            <a:fillRect/>
+          </a:stretch>
+        </p:blipFill>
+        <p:spPr>
+          <a:xfrm>
+            <a:off x="1209040" y="1640840"/>
+            <a:ext cx="9161145" cy="4286250"/>
+          </a:xfrm>
+          <a:prstGeom prst="rect">
+            <a:avLst/>
+          </a:prstGeom>
+        </p:spPr>
+      </p:pic>
+    </p:spTree>
+  </p:cSld>
+  <p:clrMapOvr>
+    <a:masterClrMapping/>
+  </p:clrMapOvr>
+</p:sld>
+</file>
+
+<file path=ppt/slides/slide31.xml><?xml version="1.0" encoding="utf-8"?>
+<p:sld xmlns:a="http://schemas.openxmlformats.org/drawingml/2006/main" xmlns:r="http://schemas.openxmlformats.org/officeDocument/2006/relationships" xmlns:p="http://schemas.openxmlformats.org/presentationml/2006/main">
+  <p:cSld>
+    <p:spTree>
+      <p:nvGrpSpPr>
+        <p:cNvPr id="1" name=""/>
+        <p:cNvGrpSpPr/>
+        <p:nvPr/>
+      </p:nvGrpSpPr>
+      <p:grpSpPr/>
+      <p:sp>
+        <p:nvSpPr>
+          <p:cNvPr id="2" name="Title 1"/>
+          <p:cNvSpPr/>
+          <p:nvPr>
+            <p:ph type="title"/>
+          </p:nvPr>
+        </p:nvSpPr>
+        <p:spPr/>
+        <p:txBody>
+          <a:bodyPr>
+            <a:normAutofit fontScale="90000"/>
+          </a:bodyPr>
+          <a:p>
+            <a:r>
+              <a:rPr lang="en-US">
+                <a:sym typeface="+mn-ea"/>
+              </a:rPr>
+              <a:t>Giao diện thiết kế trang DonViTinh-&gt;Create.cshtml</a:t>
+            </a:r>
+            <a:endParaRPr lang="en-US"/>
+          </a:p>
+        </p:txBody>
+      </p:sp>
+      <p:sp>
+        <p:nvSpPr>
+          <p:cNvPr id="3" name="Text Placeholder 2"/>
+          <p:cNvSpPr/>
+          <p:nvPr>
+            <p:ph type="body" idx="1"/>
+          </p:nvPr>
+        </p:nvSpPr>
+        <p:spPr/>
+        <p:txBody>
+          <a:bodyPr/>
+          <a:p>
+            <a:endParaRPr lang="en-US"/>
+          </a:p>
+        </p:txBody>
+      </p:sp>
+      <p:pic>
+        <p:nvPicPr>
+          <p:cNvPr id="4" name="Picture 3" descr="Screenshot 2026-09-25 133423"/>
+          <p:cNvPicPr>
+            <a:picLocks noChangeAspect="1"/>
+          </p:cNvPicPr>
+          <p:nvPr/>
+        </p:nvPicPr>
+        <p:blipFill>
+          <a:blip r:embed="rId1"/>
+          <a:stretch>
+            <a:fillRect/>
+          </a:stretch>
+        </p:blipFill>
+        <p:spPr>
+          <a:xfrm>
+            <a:off x="839470" y="1484630"/>
+            <a:ext cx="4920615" cy="4582795"/>
+          </a:xfrm>
+          <a:prstGeom prst="rect">
+            <a:avLst/>
+          </a:prstGeom>
+        </p:spPr>
+      </p:pic>
+      <p:pic>
+        <p:nvPicPr>
+          <p:cNvPr id="5" name="Picture 4" descr="Screenshot 2026-09-25 133431"/>
+          <p:cNvPicPr>
+            <a:picLocks noChangeAspect="1"/>
+          </p:cNvPicPr>
+          <p:nvPr/>
+        </p:nvPicPr>
+        <p:blipFill>
+          <a:blip r:embed="rId2"/>
+          <a:stretch>
+            <a:fillRect/>
+          </a:stretch>
+        </p:blipFill>
+        <p:spPr>
+          <a:xfrm>
+            <a:off x="6312535" y="1521460"/>
+            <a:ext cx="5353050" cy="4558665"/>
+          </a:xfrm>
+          <a:prstGeom prst="rect">
+            <a:avLst/>
+          </a:prstGeom>
+        </p:spPr>
+      </p:pic>
+    </p:spTree>
+  </p:cSld>
+  <p:clrMapOvr>
+    <a:masterClrMapping/>
+  </p:clrMapOvr>
+</p:sld>
+</file>
+
+<file path=ppt/slides/slide32.xml><?xml version="1.0" encoding="utf-8"?>
+<p:sld xmlns:a="http://schemas.openxmlformats.org/drawingml/2006/main" xmlns:r="http://schemas.openxmlformats.org/officeDocument/2006/relationships" xmlns:p="http://schemas.openxmlformats.org/presentationml/2006/main">
+  <p:cSld>
+    <p:spTree>
+      <p:nvGrpSpPr>
+        <p:cNvPr id="1" name=""/>
+        <p:cNvGrpSpPr/>
+        <p:nvPr/>
+      </p:nvGrpSpPr>
+      <p:grpSpPr/>
+      <p:sp>
+        <p:nvSpPr>
+          <p:cNvPr id="2" name="Title 1"/>
+          <p:cNvSpPr/>
+          <p:nvPr>
+            <p:ph type="title"/>
+          </p:nvPr>
+        </p:nvSpPr>
+        <p:spPr/>
+        <p:txBody>
+          <a:bodyPr>
+            <a:normAutofit fontScale="90000"/>
+          </a:bodyPr>
+          <a:p>
+            <a:r>
+              <a:rPr lang="en-US">
+                <a:sym typeface="+mn-ea"/>
+              </a:rPr>
+              <a:t>PROC DonViTinh_Them</a:t>
+            </a:r>
+            <a:endParaRPr lang="en-US"/>
+          </a:p>
+        </p:txBody>
+      </p:sp>
+      <p:sp>
+        <p:nvSpPr>
+          <p:cNvPr id="3" name="Text Placeholder 2"/>
+          <p:cNvSpPr/>
+          <p:nvPr>
+            <p:ph type="body" idx="1"/>
+          </p:nvPr>
+        </p:nvSpPr>
+        <p:spPr/>
+        <p:txBody>
+          <a:bodyPr/>
+          <a:p>
+            <a:endParaRPr lang="en-US"/>
+          </a:p>
+        </p:txBody>
+      </p:sp>
+      <p:pic>
+        <p:nvPicPr>
+          <p:cNvPr id="4" name="Picture 3" descr="Screenshot 2026-09-25 123328"/>
+          <p:cNvPicPr>
+            <a:picLocks noChangeAspect="1"/>
+          </p:cNvPicPr>
+          <p:nvPr/>
+        </p:nvPicPr>
+        <p:blipFill>
+          <a:blip r:embed="rId1"/>
+          <a:stretch>
+            <a:fillRect/>
+          </a:stretch>
+        </p:blipFill>
+        <p:spPr>
+          <a:xfrm>
+            <a:off x="479425" y="1341120"/>
+            <a:ext cx="11042015" cy="4862195"/>
+          </a:xfrm>
+          <a:prstGeom prst="rect">
+            <a:avLst/>
+          </a:prstGeom>
+        </p:spPr>
+      </p:pic>
+    </p:spTree>
+  </p:cSld>
+  <p:clrMapOvr>
+    <a:masterClrMapping/>
+  </p:clrMapOvr>
+</p:sld>
+</file>
+
+<file path=ppt/slides/slide33.xml><?xml version="1.0" encoding="utf-8"?>
+<p:sld xmlns:a="http://schemas.openxmlformats.org/drawingml/2006/main" xmlns:r="http://schemas.openxmlformats.org/officeDocument/2006/relationships" xmlns:p="http://schemas.openxmlformats.org/presentationml/2006/main">
+  <p:cSld>
+    <p:spTree>
+      <p:nvGrpSpPr>
+        <p:cNvPr id="1" name=""/>
+        <p:cNvGrpSpPr/>
+        <p:nvPr/>
+      </p:nvGrpSpPr>
+      <p:grpSpPr/>
+      <p:sp>
+        <p:nvSpPr>
+          <p:cNvPr id="2" name="Title 1"/>
+          <p:cNvSpPr/>
+          <p:nvPr>
+            <p:ph type="title"/>
+          </p:nvPr>
+        </p:nvSpPr>
+        <p:spPr/>
+        <p:txBody>
+          <a:bodyPr/>
+          <a:p>
+            <a:endParaRPr lang="en-US"/>
+          </a:p>
+        </p:txBody>
+      </p:sp>
+      <p:sp>
+        <p:nvSpPr>
+          <p:cNvPr id="3" name="Text Placeholder 2"/>
+          <p:cNvSpPr/>
+          <p:nvPr>
+            <p:ph type="body" idx="1"/>
+          </p:nvPr>
+        </p:nvSpPr>
+        <p:spPr/>
+        <p:txBody>
+          <a:bodyPr/>
+          <a:p>
+            <a:endParaRPr lang="en-US"/>
+          </a:p>
+        </p:txBody>
+      </p:sp>
+    </p:spTree>
+  </p:cSld>
+  <p:clrMapOvr>
+    <a:masterClrMapping/>
+  </p:clrMapOvr>
+</p:sld>
+</file>
+
+<file path=ppt/slides/slide34.xml><?xml version="1.0" encoding="utf-8"?>
+<p:sld xmlns:a="http://schemas.openxmlformats.org/drawingml/2006/main" xmlns:r="http://schemas.openxmlformats.org/officeDocument/2006/relationships" xmlns:p="http://schemas.openxmlformats.org/presentationml/2006/main">
+  <p:cSld>
+    <p:spTree>
+      <p:nvGrpSpPr>
+        <p:cNvPr id="1" name=""/>
+        <p:cNvGrpSpPr/>
+        <p:nvPr/>
+      </p:nvGrpSpPr>
+      <p:grpSpPr/>
+      <p:sp>
+        <p:nvSpPr>
+          <p:cNvPr id="2" name="Title 1"/>
+          <p:cNvSpPr/>
+          <p:nvPr>
+            <p:ph type="title"/>
+          </p:nvPr>
+        </p:nvSpPr>
+        <p:spPr/>
+        <p:txBody>
+          <a:bodyPr>
+            <a:normAutofit fontScale="90000"/>
+          </a:bodyPr>
+          <a:p>
+            <a:r>
+              <a:rPr lang="en-US">
+                <a:sym typeface="+mn-ea"/>
+              </a:rPr>
+              <a:t>PROC DonViTinh_Sua</a:t>
+            </a:r>
+            <a:endParaRPr lang="en-US"/>
+          </a:p>
+        </p:txBody>
+      </p:sp>
+      <p:sp>
+        <p:nvSpPr>
+          <p:cNvPr id="3" name="Text Placeholder 2"/>
+          <p:cNvSpPr/>
+          <p:nvPr>
+            <p:ph type="body" idx="1"/>
+          </p:nvPr>
+        </p:nvSpPr>
+        <p:spPr/>
+        <p:txBody>
+          <a:bodyPr/>
+          <a:p>
+            <a:endParaRPr lang="en-US"/>
+          </a:p>
+        </p:txBody>
+      </p:sp>
+      <p:pic>
+        <p:nvPicPr>
+          <p:cNvPr id="4" name="Picture 3" descr="Screenshot 2026-09-25 134229"/>
+          <p:cNvPicPr>
+            <a:picLocks noChangeAspect="1"/>
+          </p:cNvPicPr>
+          <p:nvPr/>
+        </p:nvPicPr>
+        <p:blipFill>
+          <a:blip r:embed="rId1"/>
+          <a:stretch>
+            <a:fillRect/>
+          </a:stretch>
+        </p:blipFill>
+        <p:spPr>
+          <a:xfrm>
+            <a:off x="688340" y="1398270"/>
+            <a:ext cx="10682605" cy="4903470"/>
+          </a:xfrm>
+          <a:prstGeom prst="rect">
+            <a:avLst/>
+          </a:prstGeom>
+        </p:spPr>
+      </p:pic>
+    </p:spTree>
+  </p:cSld>
+  <p:clrMapOvr>
+    <a:masterClrMapping/>
+  </p:clrMapOvr>
+</p:sld>
+</file>
+
+<file path=ppt/slides/slide35.xml><?xml version="1.0" encoding="utf-8"?>
 <p:sld xmlns:a="http://schemas.openxmlformats.org/drawingml/2006/main" xmlns:r="http://schemas.openxmlformats.org/officeDocument/2006/relationships" xmlns:p="http://schemas.openxmlformats.org/presentationml/2006/main">
   <p:cSld>
     <p:spTree>

--- a/Data/pp.báo cáo.pptx
+++ b/Data/pp.báo cáo.pptx
@@ -34739,7 +34739,7 @@
       </p:pic>
       <p:pic>
         <p:nvPicPr>
-          <p:cNvPr id="1" name="Picture 0" descr="Screenshot 2026-09-25 121656"/>
+          <p:cNvPr id="3" name="Picture 2" descr="Screenshot 2026-09-25 121656"/>
           <p:cNvPicPr>
             <a:picLocks noChangeAspect="1"/>
           </p:cNvPicPr>
@@ -35220,8 +35220,16 @@
         </p:nvSpPr>
         <p:spPr/>
         <p:txBody>
-          <a:bodyPr/>
+          <a:bodyPr>
+            <a:normAutofit fontScale="90000"/>
+          </a:bodyPr>
           <a:p>
+            <a:r>
+              <a:rPr lang="en-US">
+                <a:sym typeface="+mn-ea"/>
+              </a:rPr>
+              <a:t>Giao diện thiết kế trang DonViTinh-&gt;Edit.cshtml</a:t>
+            </a:r>
             <a:endParaRPr lang="en-US"/>
           </a:p>
         </p:txBody>
@@ -35242,6 +35250,30 @@
           </a:p>
         </p:txBody>
       </p:sp>
+      <p:pic>
+        <p:nvPicPr>
+          <p:cNvPr id="4" name="Picture 3" descr="Screenshot 2026-09-26 103255"/>
+          <p:cNvPicPr>
+            <a:picLocks noChangeAspect="1"/>
+          </p:cNvPicPr>
+          <p:nvPr/>
+        </p:nvPicPr>
+        <p:blipFill>
+          <a:blip r:embed="rId1"/>
+          <a:stretch>
+            <a:fillRect/>
+          </a:stretch>
+        </p:blipFill>
+        <p:spPr>
+          <a:xfrm>
+            <a:off x="839470" y="1327785"/>
+            <a:ext cx="10285095" cy="4958080"/>
+          </a:xfrm>
+          <a:prstGeom prst="rect">
+            <a:avLst/>
+          </a:prstGeom>
+        </p:spPr>
+      </p:pic>
     </p:spTree>
   </p:cSld>
   <p:clrMapOvr>
